--- a/Kinto_Smart_Ops_Pitch_Deck_V5.pptx
+++ b/Kinto_Smart_Ops_Pitch_Deck_V5.pptx
@@ -9011,7 +9011,7 @@
                 <a:ea typeface="Calibri" pitchFamily="34" charset="-122"/>
                 <a:cs typeface="Calibri" pitchFamily="34" charset="-120"/>
               </a:rPr>
-              <a:t>ERPNext</a:t>
+              <a:t>Vyapar / Marg</a:t>
             </a:r>
             <a:endParaRPr lang="en-US" sz="900" dirty="0"/>
           </a:p>
@@ -9395,7 +9395,7 @@
                 <a:ea typeface="Calibri" pitchFamily="34" charset="-122"/>
                 <a:cs typeface="Calibri" pitchFamily="34" charset="-120"/>
               </a:rPr>
-              <a:t>✔ Full</a:t>
+              <a:t>✔ Basic</a:t>
             </a:r>
             <a:endParaRPr lang="en-US" sz="850" dirty="0"/>
           </a:p>
@@ -9773,13 +9773,13 @@
             <a:r>
               <a:rPr lang="en-US" sz="850" dirty="0">
                 <a:solidFill>
-                  <a:srgbClr val="15803D"/>
-                </a:solidFill>
-                <a:latin typeface="Calibri" pitchFamily="34" charset="0"/>
-                <a:ea typeface="Calibri" pitchFamily="34" charset="-122"/>
-                <a:cs typeface="Calibri" pitchFamily="34" charset="-120"/>
-              </a:rPr>
-              <a:t>✔ Full</a:t>
+                  <a:srgbClr val="9CA3AF"/>
+                </a:solidFill>
+                <a:latin typeface="Calibri" pitchFamily="34" charset="0"/>
+                <a:ea typeface="Calibri" pitchFamily="34" charset="-122"/>
+                <a:cs typeface="Calibri" pitchFamily="34" charset="-120"/>
+              </a:rPr>
+              <a:t>✘ None</a:t>
             </a:r>
             <a:endParaRPr lang="en-US" sz="850" dirty="0"/>
           </a:p>
@@ -10541,13 +10541,13 @@
             <a:r>
               <a:rPr lang="en-US" sz="850" dirty="0">
                 <a:solidFill>
-                  <a:srgbClr val="15803D"/>
-                </a:solidFill>
-                <a:latin typeface="Calibri" pitchFamily="34" charset="0"/>
-                <a:ea typeface="Calibri" pitchFamily="34" charset="-122"/>
-                <a:cs typeface="Calibri" pitchFamily="34" charset="-120"/>
-              </a:rPr>
-              <a:t>✔ Full</a:t>
+                  <a:srgbClr val="9CA3AF"/>
+                </a:solidFill>
+                <a:latin typeface="Calibri" pitchFamily="34" charset="0"/>
+                <a:ea typeface="Calibri" pitchFamily="34" charset="-122"/>
+                <a:cs typeface="Calibri" pitchFamily="34" charset="-120"/>
+              </a:rPr>
+              <a:t>✘ None</a:t>
             </a:r>
             <a:endParaRPr lang="en-US" sz="850" dirty="0"/>
           </a:p>
@@ -10925,13 +10925,13 @@
             <a:r>
               <a:rPr lang="en-US" sz="850" dirty="0">
                 <a:solidFill>
-                  <a:srgbClr val="15803D"/>
-                </a:solidFill>
-                <a:latin typeface="Calibri" pitchFamily="34" charset="0"/>
-                <a:ea typeface="Calibri" pitchFamily="34" charset="-122"/>
-                <a:cs typeface="Calibri" pitchFamily="34" charset="-120"/>
-              </a:rPr>
-              <a:t>✔ Full</a:t>
+                  <a:srgbClr val="9CA3AF"/>
+                </a:solidFill>
+                <a:latin typeface="Calibri" pitchFamily="34" charset="0"/>
+                <a:ea typeface="Calibri" pitchFamily="34" charset="-122"/>
+                <a:cs typeface="Calibri" pitchFamily="34" charset="-120"/>
+              </a:rPr>
+              <a:t>✘ None</a:t>
             </a:r>
             <a:endParaRPr lang="en-US" sz="850" dirty="0"/>
           </a:p>
@@ -11309,13 +11309,13 @@
             <a:r>
               <a:rPr lang="en-US" sz="850" dirty="0">
                 <a:solidFill>
-                  <a:srgbClr val="D97706"/>
-                </a:solidFill>
-                <a:latin typeface="Calibri" pitchFamily="34" charset="0"/>
-                <a:ea typeface="Calibri" pitchFamily="34" charset="-122"/>
-                <a:cs typeface="Calibri" pitchFamily="34" charset="-120"/>
-              </a:rPr>
-              <a:t>⚠ Basic</a:t>
+                  <a:srgbClr val="9CA3AF"/>
+                </a:solidFill>
+                <a:latin typeface="Calibri" pitchFamily="34" charset="0"/>
+                <a:ea typeface="Calibri" pitchFamily="34" charset="-122"/>
+                <a:cs typeface="Calibri" pitchFamily="34" charset="-120"/>
+              </a:rPr>
+              <a:t>✘ None</a:t>
             </a:r>
             <a:endParaRPr lang="en-US" sz="850" dirty="0"/>
           </a:p>
@@ -11693,13 +11693,13 @@
             <a:r>
               <a:rPr lang="en-US" sz="850" dirty="0">
                 <a:solidFill>
-                  <a:srgbClr val="15803D"/>
-                </a:solidFill>
-                <a:latin typeface="Calibri" pitchFamily="34" charset="0"/>
-                <a:ea typeface="Calibri" pitchFamily="34" charset="-122"/>
-                <a:cs typeface="Calibri" pitchFamily="34" charset="-120"/>
-              </a:rPr>
-              <a:t>✔ Full</a:t>
+                  <a:srgbClr val="9CA3AF"/>
+                </a:solidFill>
+                <a:latin typeface="Calibri" pitchFamily="34" charset="0"/>
+                <a:ea typeface="Calibri" pitchFamily="34" charset="-122"/>
+                <a:cs typeface="Calibri" pitchFamily="34" charset="-120"/>
+              </a:rPr>
+              <a:t>✘ None</a:t>
             </a:r>
             <a:endParaRPr lang="en-US" sz="850" dirty="0"/>
           </a:p>
@@ -12077,13 +12077,13 @@
             <a:r>
               <a:rPr lang="en-US" sz="850" dirty="0">
                 <a:solidFill>
-                  <a:srgbClr val="15803D"/>
-                </a:solidFill>
-                <a:latin typeface="Calibri" pitchFamily="34" charset="0"/>
-                <a:ea typeface="Calibri" pitchFamily="34" charset="-122"/>
-                <a:cs typeface="Calibri" pitchFamily="34" charset="-120"/>
-              </a:rPr>
-              <a:t>✔ Yes</a:t>
+                  <a:srgbClr val="D97706"/>
+                </a:solidFill>
+                <a:latin typeface="Calibri" pitchFamily="34" charset="0"/>
+                <a:ea typeface="Calibri" pitchFamily="34" charset="-122"/>
+                <a:cs typeface="Calibri" pitchFamily="34" charset="-120"/>
+              </a:rPr>
+              <a:t>⚠ Mobile</a:t>
             </a:r>
             <a:endParaRPr lang="en-US" sz="850" dirty="0"/>
           </a:p>
@@ -12467,7 +12467,7 @@
                 <a:ea typeface="Calibri" pitchFamily="34" charset="-122"/>
                 <a:cs typeface="Calibri" pitchFamily="34" charset="-120"/>
               </a:rPr>
-              <a:t>2–4 weeks</a:t>
+              <a:t>1–2 days</a:t>
             </a:r>
             <a:endParaRPr lang="en-US" sz="850" dirty="0"/>
           </a:p>
@@ -12851,7 +12851,7 @@
                 <a:ea typeface="Calibri" pitchFamily="34" charset="-122"/>
                 <a:cs typeface="Calibri" pitchFamily="34" charset="-120"/>
               </a:rPr>
-              <a:t>Free*</a:t>
+              <a:t>₹1,099/yr</a:t>
             </a:r>
             <a:endParaRPr lang="en-US" sz="850" dirty="0"/>
           </a:p>
@@ -13235,7 +13235,7 @@
                 <a:ea typeface="Calibri" pitchFamily="34" charset="-122"/>
                 <a:cs typeface="Calibri" pitchFamily="34" charset="-120"/>
               </a:rPr>
-              <a:t>Community</a:t>
+              <a:t>Basic</a:t>
             </a:r>
             <a:endParaRPr lang="en-US" sz="850" dirty="0"/>
           </a:p>
@@ -13306,17 +13306,17 @@
               <a:buNone/>
             </a:pPr>
             <a:r>
-              <a:rPr lang="en-US" sz="750" i="1" dirty="0">
-                <a:solidFill>
-                  <a:srgbClr val="64748B"/>
-                </a:solidFill>
-                <a:latin typeface="Calibri" pitchFamily="34" charset="0"/>
-                <a:ea typeface="Calibri" pitchFamily="34" charset="-122"/>
-                <a:cs typeface="Calibri" pitchFamily="34" charset="-120"/>
-              </a:rPr>
-              <a:t>* ERPNext is open-source but requires significant IT setup cost and expertise.</a:t>
-            </a:r>
-            <a:endParaRPr lang="en-US" sz="750" dirty="0"/>
+              <a:rPr lang="en-US" sz="800" b="1" dirty="0">
+                <a:solidFill>
+                  <a:srgbClr val="2563EB"/>
+                </a:solidFill>
+                <a:latin typeface="Calibri" pitchFamily="34" charset="0"/>
+                <a:ea typeface="Calibri" pitchFamily="34" charset="-122"/>
+                <a:cs typeface="Calibri" pitchFamily="34" charset="-120"/>
+              </a:rPr>
+              <a:t>Kinto Smart Ops is the only solution that covers Manufacturing + HR &amp; Payroll + CRM + WhatsApp natively in a single platform.</a:t>
+            </a:r>
+            <a:endParaRPr lang="en-US" sz="800" dirty="0"/>
           </a:p>
         </p:txBody>
       </p:sp>

--- a/Kinto_Smart_Ops_Pitch_Deck_V5.pptx
+++ b/Kinto_Smart_Ops_Pitch_Deck_V5.pptx
@@ -8952,7 +8952,7 @@
                 <a:ea typeface="Calibri" pitchFamily="34" charset="-122"/>
                 <a:cs typeface="Calibri" pitchFamily="34" charset="-120"/>
               </a:rPr>
-              <a:t>SAP B1 / MS Dynamics</a:t>
+              <a:t>Odoo</a:t>
             </a:r>
             <a:endParaRPr lang="en-US" sz="900" dirty="0"/>
           </a:p>
@@ -10227,7 +10227,7 @@
                 <a:ea typeface="Calibri" pitchFamily="34" charset="-122"/>
                 <a:cs typeface="Calibri" pitchFamily="34" charset="-120"/>
               </a:rPr>
-              <a:t>HR &amp; Payroll Built-In</a:t>
+              <a:t>Indian HR &amp; Payroll</a:t>
             </a:r>
             <a:endParaRPr lang="en-US" sz="900" dirty="0"/>
           </a:p>
@@ -10483,7 +10483,7 @@
                 <a:ea typeface="Calibri" pitchFamily="34" charset="-122"/>
                 <a:cs typeface="Calibri" pitchFamily="34" charset="-120"/>
               </a:rPr>
-              <a:t>⚠ Add-on</a:t>
+              <a:t>⚠ Needs custom</a:t>
             </a:r>
             <a:endParaRPr lang="en-US" sz="850" dirty="0"/>
           </a:p>
@@ -10861,13 +10861,13 @@
             <a:r>
               <a:rPr lang="en-US" sz="850" dirty="0">
                 <a:solidFill>
-                  <a:srgbClr val="D97706"/>
-                </a:solidFill>
-                <a:latin typeface="Calibri" pitchFamily="34" charset="0"/>
-                <a:ea typeface="Calibri" pitchFamily="34" charset="-122"/>
-                <a:cs typeface="Calibri" pitchFamily="34" charset="-120"/>
-              </a:rPr>
-              <a:t>⚠ Add-on</a:t>
+                  <a:srgbClr val="15803D"/>
+                </a:solidFill>
+                <a:latin typeface="Calibri" pitchFamily="34" charset="0"/>
+                <a:ea typeface="Calibri" pitchFamily="34" charset="-122"/>
+                <a:cs typeface="Calibri" pitchFamily="34" charset="-120"/>
+              </a:rPr>
+              <a:t>✔ Full</a:t>
             </a:r>
             <a:endParaRPr lang="en-US" sz="850" dirty="0"/>
           </a:p>
@@ -10995,7 +10995,7 @@
                 <a:ea typeface="Calibri" pitchFamily="34" charset="-122"/>
                 <a:cs typeface="Calibri" pitchFamily="34" charset="-120"/>
               </a:rPr>
-              <a:t>Employee Self-Service Portal</a:t>
+              <a:t>Employee Self-Service</a:t>
             </a:r>
             <a:endParaRPr lang="en-US" sz="900" dirty="0"/>
           </a:p>
@@ -11251,7 +11251,7 @@
                 <a:ea typeface="Calibri" pitchFamily="34" charset="-122"/>
                 <a:cs typeface="Calibri" pitchFamily="34" charset="-120"/>
               </a:rPr>
-              <a:t>⚠ Add-on</a:t>
+              <a:t>⚠ Basic</a:t>
             </a:r>
             <a:endParaRPr lang="en-US" sz="850" dirty="0"/>
           </a:p>
@@ -11635,7 +11635,7 @@
                 <a:ea typeface="Calibri" pitchFamily="34" charset="-122"/>
                 <a:cs typeface="Calibri" pitchFamily="34" charset="-120"/>
               </a:rPr>
-              <a:t>⚠ Add-on</a:t>
+              <a:t>⚠ Enterprise+</a:t>
             </a:r>
             <a:endParaRPr lang="en-US" sz="850" dirty="0"/>
           </a:p>
@@ -12403,7 +12403,7 @@
                 <a:ea typeface="Calibri" pitchFamily="34" charset="-122"/>
                 <a:cs typeface="Calibri" pitchFamily="34" charset="-120"/>
               </a:rPr>
-              <a:t>3–6 months</a:t>
+              <a:t>2–4 months</a:t>
             </a:r>
             <a:endParaRPr lang="en-US" sz="850" dirty="0"/>
           </a:p>
@@ -12787,7 +12787,7 @@
                 <a:ea typeface="Calibri" pitchFamily="34" charset="-122"/>
                 <a:cs typeface="Calibri" pitchFamily="34" charset="-120"/>
               </a:rPr>
-              <a:t>₹2L+/yr</a:t>
+              <a:t>₹2,500+/user</a:t>
             </a:r>
             <a:endParaRPr lang="en-US" sz="850" dirty="0"/>
           </a:p>
@@ -13171,7 +13171,7 @@
                 <a:ea typeface="Calibri" pitchFamily="34" charset="-122"/>
                 <a:cs typeface="Calibri" pitchFamily="34" charset="-120"/>
               </a:rPr>
-              <a:t>Paid</a:t>
+              <a:t>Paid (costly)</a:t>
             </a:r>
             <a:endParaRPr lang="en-US" sz="850" dirty="0"/>
           </a:p>

--- a/Kinto_Smart_Ops_Pitch_Deck_V5.pptx
+++ b/Kinto_Smart_Ops_Pitch_Deck_V5.pptx
@@ -20753,7 +20753,7 @@
                 <a:ea typeface="Calibri" pitchFamily="34" charset="-122"/>
                 <a:cs typeface="Calibri" pitchFamily="34" charset="-120"/>
               </a:rPr>
-              <a:t>Everything your factory needs — all in one place</a:t>
+              <a:t>Full platform unlocked at Enterprise — ₹2,599/month</a:t>
             </a:r>
             <a:endParaRPr lang="en-US" sz="1200" dirty="0"/>
           </a:p>
@@ -20846,12 +20846,234 @@
         </p:nvSpPr>
         <p:spPr>
           <a:xfrm>
-            <a:off x="228600" y="1234440"/>
-            <a:ext cx="2194560" cy="1417320"/>
+            <a:off x="6858000" y="1170432"/>
+            <a:ext cx="1554480" cy="237744"/>
           </a:xfrm>
           <a:prstGeom prst="rect">
             <a:avLst>
-              <a:gd name="adj" fmla="val 5161"/>
+              <a:gd name="adj" fmla="val 15385"/>
+            </a:avLst>
+          </a:prstGeom>
+          <a:solidFill>
+            <a:srgbClr val="F1F5F9"/>
+          </a:solidFill>
+          <a:ln/>
+        </p:spPr>
+      </p:sp>
+      <p:sp>
+        <p:nvSpPr>
+          <p:cNvPr id="9" name="Text 7"/>
+          <p:cNvSpPr/>
+          <p:nvPr/>
+        </p:nvSpPr>
+        <p:spPr>
+          <a:xfrm>
+            <a:off x="6858000" y="1170432"/>
+            <a:ext cx="1554480" cy="237744"/>
+          </a:xfrm>
+          <a:prstGeom prst="rect">
+            <a:avLst/>
+          </a:prstGeom>
+          <a:noFill/>
+          <a:ln/>
+        </p:spPr>
+        <p:txBody>
+          <a:bodyPr wrap="square" rtlCol="0" anchor="ctr"/>
+          <a:lstStyle/>
+          <a:p>
+            <a:pPr algn="ctr" indent="0" marL="0">
+              <a:buNone/>
+            </a:pPr>
+            <a:r>
+              <a:rPr lang="en-US" sz="750" b="1" dirty="0">
+                <a:solidFill>
+                  <a:srgbClr val="64748B"/>
+                </a:solidFill>
+                <a:latin typeface="Calibri" pitchFamily="34" charset="0"/>
+                <a:ea typeface="Calibri" pitchFamily="34" charset="-122"/>
+                <a:cs typeface="Calibri" pitchFamily="34" charset="-120"/>
+              </a:rPr>
+              <a:t>BASIC</a:t>
+            </a:r>
+            <a:endParaRPr lang="en-US" sz="750" dirty="0"/>
+          </a:p>
+        </p:txBody>
+      </p:sp>
+      <p:sp>
+        <p:nvSpPr>
+          <p:cNvPr id="10" name="Shape 8"/>
+          <p:cNvSpPr/>
+          <p:nvPr/>
+        </p:nvSpPr>
+        <p:spPr>
+          <a:xfrm>
+            <a:off x="8549640" y="1170432"/>
+            <a:ext cx="1554480" cy="237744"/>
+          </a:xfrm>
+          <a:prstGeom prst="rect">
+            <a:avLst>
+              <a:gd name="adj" fmla="val 15385"/>
+            </a:avLst>
+          </a:prstGeom>
+          <a:solidFill>
+            <a:srgbClr val="DBEAFE"/>
+          </a:solidFill>
+          <a:ln/>
+        </p:spPr>
+      </p:sp>
+      <p:sp>
+        <p:nvSpPr>
+          <p:cNvPr id="11" name="Text 9"/>
+          <p:cNvSpPr/>
+          <p:nvPr/>
+        </p:nvSpPr>
+        <p:spPr>
+          <a:xfrm>
+            <a:off x="8549640" y="1170432"/>
+            <a:ext cx="1554480" cy="237744"/>
+          </a:xfrm>
+          <a:prstGeom prst="rect">
+            <a:avLst/>
+          </a:prstGeom>
+          <a:noFill/>
+          <a:ln/>
+        </p:spPr>
+        <p:txBody>
+          <a:bodyPr wrap="square" rtlCol="0" anchor="ctr"/>
+          <a:lstStyle/>
+          <a:p>
+            <a:pPr algn="ctr" indent="0" marL="0">
+              <a:buNone/>
+            </a:pPr>
+            <a:r>
+              <a:rPr lang="en-US" sz="750" b="1" dirty="0">
+                <a:solidFill>
+                  <a:srgbClr val="0369A1"/>
+                </a:solidFill>
+                <a:latin typeface="Calibri" pitchFamily="34" charset="0"/>
+                <a:ea typeface="Calibri" pitchFamily="34" charset="-122"/>
+                <a:cs typeface="Calibri" pitchFamily="34" charset="-120"/>
+              </a:rPr>
+              <a:t>PRO</a:t>
+            </a:r>
+            <a:endParaRPr lang="en-US" sz="750" dirty="0"/>
+          </a:p>
+        </p:txBody>
+      </p:sp>
+      <p:sp>
+        <p:nvSpPr>
+          <p:cNvPr id="12" name="Shape 10"/>
+          <p:cNvSpPr/>
+          <p:nvPr/>
+        </p:nvSpPr>
+        <p:spPr>
+          <a:xfrm>
+            <a:off x="10241280" y="1170432"/>
+            <a:ext cx="1554480" cy="237744"/>
+          </a:xfrm>
+          <a:prstGeom prst="rect">
+            <a:avLst>
+              <a:gd name="adj" fmla="val 15385"/>
+            </a:avLst>
+          </a:prstGeom>
+          <a:solidFill>
+            <a:srgbClr val="1E3A5F"/>
+          </a:solidFill>
+          <a:ln/>
+        </p:spPr>
+      </p:sp>
+      <p:sp>
+        <p:nvSpPr>
+          <p:cNvPr id="13" name="Text 11"/>
+          <p:cNvSpPr/>
+          <p:nvPr/>
+        </p:nvSpPr>
+        <p:spPr>
+          <a:xfrm>
+            <a:off x="10241280" y="1170432"/>
+            <a:ext cx="1554480" cy="237744"/>
+          </a:xfrm>
+          <a:prstGeom prst="rect">
+            <a:avLst/>
+          </a:prstGeom>
+          <a:noFill/>
+          <a:ln/>
+        </p:spPr>
+        <p:txBody>
+          <a:bodyPr wrap="square" rtlCol="0" anchor="ctr"/>
+          <a:lstStyle/>
+          <a:p>
+            <a:pPr algn="ctr" indent="0" marL="0">
+              <a:buNone/>
+            </a:pPr>
+            <a:r>
+              <a:rPr lang="en-US" sz="750" b="1" dirty="0">
+                <a:solidFill>
+                  <a:srgbClr val="FFFFFF"/>
+                </a:solidFill>
+                <a:latin typeface="Calibri" pitchFamily="34" charset="0"/>
+                <a:ea typeface="Calibri" pitchFamily="34" charset="-122"/>
+                <a:cs typeface="Calibri" pitchFamily="34" charset="-120"/>
+              </a:rPr>
+              <a:t>ENTERPRISE</a:t>
+            </a:r>
+            <a:endParaRPr lang="en-US" sz="750" dirty="0"/>
+          </a:p>
+        </p:txBody>
+      </p:sp>
+      <p:sp>
+        <p:nvSpPr>
+          <p:cNvPr id="14" name="Text 12"/>
+          <p:cNvSpPr/>
+          <p:nvPr/>
+        </p:nvSpPr>
+        <p:spPr>
+          <a:xfrm>
+            <a:off x="6309360" y="1170432"/>
+            <a:ext cx="548640" cy="237744"/>
+          </a:xfrm>
+          <a:prstGeom prst="rect">
+            <a:avLst/>
+          </a:prstGeom>
+          <a:noFill/>
+          <a:ln/>
+        </p:spPr>
+        <p:txBody>
+          <a:bodyPr wrap="square" rtlCol="0" anchor="ctr"/>
+          <a:lstStyle/>
+          <a:p>
+            <a:pPr indent="0" marL="0">
+              <a:buNone/>
+            </a:pPr>
+            <a:r>
+              <a:rPr lang="en-US" sz="750" dirty="0">
+                <a:solidFill>
+                  <a:srgbClr val="64748B"/>
+                </a:solidFill>
+                <a:latin typeface="Calibri" pitchFamily="34" charset="0"/>
+                <a:ea typeface="Calibri" pitchFamily="34" charset="-122"/>
+                <a:cs typeface="Calibri" pitchFamily="34" charset="-120"/>
+              </a:rPr>
+              <a:t>Plan:</a:t>
+            </a:r>
+            <a:endParaRPr lang="en-US" sz="750" dirty="0"/>
+          </a:p>
+        </p:txBody>
+      </p:sp>
+      <p:sp>
+        <p:nvSpPr>
+          <p:cNvPr id="15" name="Shape 13"/>
+          <p:cNvSpPr/>
+          <p:nvPr/>
+        </p:nvSpPr>
+        <p:spPr>
+          <a:xfrm>
+            <a:off x="228600" y="1481328"/>
+            <a:ext cx="2194560" cy="1536192"/>
+          </a:xfrm>
+          <a:prstGeom prst="rect">
+            <a:avLst>
+              <a:gd name="adj" fmla="val 4762"/>
             </a:avLst>
           </a:prstGeom>
           <a:solidFill>
@@ -20867,14 +21089,14 @@
       </p:sp>
       <p:sp>
         <p:nvSpPr>
-          <p:cNvPr id="9" name="Text 7"/>
-          <p:cNvSpPr/>
-          <p:nvPr/>
-        </p:nvSpPr>
-        <p:spPr>
-          <a:xfrm>
-            <a:off x="228600" y="1325880"/>
-            <a:ext cx="2194560" cy="1234440"/>
+          <p:cNvPr id="16" name="Text 14"/>
+          <p:cNvSpPr/>
+          <p:nvPr/>
+        </p:nvSpPr>
+        <p:spPr>
+          <a:xfrm>
+            <a:off x="301752" y="1591056"/>
+            <a:ext cx="2048256" cy="1005840"/>
           </a:xfrm>
           <a:prstGeom prst="rect">
             <a:avLst/>
@@ -20898,7 +21120,7 @@
                 <a:ea typeface="Calibri" pitchFamily="34" charset="-122"/>
                 <a:cs typeface="Calibri" pitchFamily="34" charset="-120"/>
               </a:rPr>
-              <a:t>Production Management</a:t>
+              <a:t>GST Invoicing</a:t>
             </a:r>
             <a:endParaRPr lang="en-US" sz="1050" dirty="0"/>
           </a:p>
@@ -20906,18 +21128,79 @@
       </p:sp>
       <p:sp>
         <p:nvSpPr>
-          <p:cNvPr id="10" name="Shape 8"/>
-          <p:cNvSpPr/>
-          <p:nvPr/>
-        </p:nvSpPr>
-        <p:spPr>
-          <a:xfrm>
-            <a:off x="2578608" y="1234440"/>
-            <a:ext cx="2194560" cy="1417320"/>
+          <p:cNvPr id="17" name="Shape 15"/>
+          <p:cNvSpPr/>
+          <p:nvPr/>
+        </p:nvSpPr>
+        <p:spPr>
+          <a:xfrm>
+            <a:off x="301752" y="2596896"/>
+            <a:ext cx="2048256" cy="256032"/>
           </a:xfrm>
           <a:prstGeom prst="rect">
             <a:avLst>
-              <a:gd name="adj" fmla="val 5161"/>
+              <a:gd name="adj" fmla="val 14286"/>
+            </a:avLst>
+          </a:prstGeom>
+          <a:solidFill>
+            <a:srgbClr val="F1F5F9"/>
+          </a:solidFill>
+          <a:ln/>
+        </p:spPr>
+      </p:sp>
+      <p:sp>
+        <p:nvSpPr>
+          <p:cNvPr id="18" name="Text 16"/>
+          <p:cNvSpPr/>
+          <p:nvPr/>
+        </p:nvSpPr>
+        <p:spPr>
+          <a:xfrm>
+            <a:off x="301752" y="2596896"/>
+            <a:ext cx="2048256" cy="256032"/>
+          </a:xfrm>
+          <a:prstGeom prst="rect">
+            <a:avLst/>
+          </a:prstGeom>
+          <a:noFill/>
+          <a:ln/>
+        </p:spPr>
+        <p:txBody>
+          <a:bodyPr wrap="square" rtlCol="0" anchor="ctr"/>
+          <a:lstStyle/>
+          <a:p>
+            <a:pPr algn="ctr" indent="0" marL="0">
+              <a:buNone/>
+            </a:pPr>
+            <a:r>
+              <a:rPr lang="en-US" sz="750" b="1" dirty="0">
+                <a:solidFill>
+                  <a:srgbClr val="64748B"/>
+                </a:solidFill>
+                <a:latin typeface="Calibri" pitchFamily="34" charset="0"/>
+                <a:ea typeface="Calibri" pitchFamily="34" charset="-122"/>
+                <a:cs typeface="Calibri" pitchFamily="34" charset="-120"/>
+              </a:rPr>
+              <a:t>BASIC</a:t>
+            </a:r>
+            <a:endParaRPr lang="en-US" sz="750" dirty="0"/>
+          </a:p>
+        </p:txBody>
+      </p:sp>
+      <p:sp>
+        <p:nvSpPr>
+          <p:cNvPr id="19" name="Shape 17"/>
+          <p:cNvSpPr/>
+          <p:nvPr/>
+        </p:nvSpPr>
+        <p:spPr>
+          <a:xfrm>
+            <a:off x="2578608" y="1481328"/>
+            <a:ext cx="2194560" cy="1536192"/>
+          </a:xfrm>
+          <a:prstGeom prst="rect">
+            <a:avLst>
+              <a:gd name="adj" fmla="val 4762"/>
             </a:avLst>
           </a:prstGeom>
           <a:solidFill>
@@ -20933,14 +21216,14 @@
       </p:sp>
       <p:sp>
         <p:nvSpPr>
-          <p:cNvPr id="11" name="Text 9"/>
-          <p:cNvSpPr/>
-          <p:nvPr/>
-        </p:nvSpPr>
-        <p:spPr>
-          <a:xfrm>
-            <a:off x="2578608" y="1325880"/>
-            <a:ext cx="2194560" cy="1234440"/>
+          <p:cNvPr id="20" name="Text 18"/>
+          <p:cNvSpPr/>
+          <p:nvPr/>
+        </p:nvSpPr>
+        <p:spPr>
+          <a:xfrm>
+            <a:off x="2651760" y="1591056"/>
+            <a:ext cx="2048256" cy="1005840"/>
           </a:xfrm>
           <a:prstGeom prst="rect">
             <a:avLst/>
@@ -20972,18 +21255,79 @@
       </p:sp>
       <p:sp>
         <p:nvSpPr>
-          <p:cNvPr id="12" name="Shape 10"/>
-          <p:cNvSpPr/>
-          <p:nvPr/>
-        </p:nvSpPr>
-        <p:spPr>
-          <a:xfrm>
-            <a:off x="4928616" y="1234440"/>
-            <a:ext cx="2194560" cy="1417320"/>
+          <p:cNvPr id="21" name="Shape 19"/>
+          <p:cNvSpPr/>
+          <p:nvPr/>
+        </p:nvSpPr>
+        <p:spPr>
+          <a:xfrm>
+            <a:off x="2651760" y="2596896"/>
+            <a:ext cx="2048256" cy="256032"/>
           </a:xfrm>
           <a:prstGeom prst="rect">
             <a:avLst>
-              <a:gd name="adj" fmla="val 5161"/>
+              <a:gd name="adj" fmla="val 14286"/>
+            </a:avLst>
+          </a:prstGeom>
+          <a:solidFill>
+            <a:srgbClr val="F1F5F9"/>
+          </a:solidFill>
+          <a:ln/>
+        </p:spPr>
+      </p:sp>
+      <p:sp>
+        <p:nvSpPr>
+          <p:cNvPr id="22" name="Text 20"/>
+          <p:cNvSpPr/>
+          <p:nvPr/>
+        </p:nvSpPr>
+        <p:spPr>
+          <a:xfrm>
+            <a:off x="2651760" y="2596896"/>
+            <a:ext cx="2048256" cy="256032"/>
+          </a:xfrm>
+          <a:prstGeom prst="rect">
+            <a:avLst/>
+          </a:prstGeom>
+          <a:noFill/>
+          <a:ln/>
+        </p:spPr>
+        <p:txBody>
+          <a:bodyPr wrap="square" rtlCol="0" anchor="ctr"/>
+          <a:lstStyle/>
+          <a:p>
+            <a:pPr algn="ctr" indent="0" marL="0">
+              <a:buNone/>
+            </a:pPr>
+            <a:r>
+              <a:rPr lang="en-US" sz="750" b="1" dirty="0">
+                <a:solidFill>
+                  <a:srgbClr val="64748B"/>
+                </a:solidFill>
+                <a:latin typeface="Calibri" pitchFamily="34" charset="0"/>
+                <a:ea typeface="Calibri" pitchFamily="34" charset="-122"/>
+                <a:cs typeface="Calibri" pitchFamily="34" charset="-120"/>
+              </a:rPr>
+              <a:t>BASIC</a:t>
+            </a:r>
+            <a:endParaRPr lang="en-US" sz="750" dirty="0"/>
+          </a:p>
+        </p:txBody>
+      </p:sp>
+      <p:sp>
+        <p:nvSpPr>
+          <p:cNvPr id="23" name="Shape 21"/>
+          <p:cNvSpPr/>
+          <p:nvPr/>
+        </p:nvSpPr>
+        <p:spPr>
+          <a:xfrm>
+            <a:off x="4928616" y="1481328"/>
+            <a:ext cx="2194560" cy="1536192"/>
+          </a:xfrm>
+          <a:prstGeom prst="rect">
+            <a:avLst>
+              <a:gd name="adj" fmla="val 4762"/>
             </a:avLst>
           </a:prstGeom>
           <a:solidFill>
@@ -20999,14 +21343,14 @@
       </p:sp>
       <p:sp>
         <p:nvSpPr>
-          <p:cNvPr id="13" name="Text 11"/>
-          <p:cNvSpPr/>
-          <p:nvPr/>
-        </p:nvSpPr>
-        <p:spPr>
-          <a:xfrm>
-            <a:off x="4928616" y="1325880"/>
-            <a:ext cx="2194560" cy="1234440"/>
+          <p:cNvPr id="24" name="Text 22"/>
+          <p:cNvSpPr/>
+          <p:nvPr/>
+        </p:nvSpPr>
+        <p:spPr>
+          <a:xfrm>
+            <a:off x="5001768" y="1591056"/>
+            <a:ext cx="2048256" cy="1005840"/>
           </a:xfrm>
           <a:prstGeom prst="rect">
             <a:avLst/>
@@ -21038,18 +21382,79 @@
       </p:sp>
       <p:sp>
         <p:nvSpPr>
-          <p:cNvPr id="14" name="Shape 12"/>
-          <p:cNvSpPr/>
-          <p:nvPr/>
-        </p:nvSpPr>
-        <p:spPr>
-          <a:xfrm>
-            <a:off x="7278624" y="1234440"/>
-            <a:ext cx="2194560" cy="1417320"/>
+          <p:cNvPr id="25" name="Shape 23"/>
+          <p:cNvSpPr/>
+          <p:nvPr/>
+        </p:nvSpPr>
+        <p:spPr>
+          <a:xfrm>
+            <a:off x="5001768" y="2596896"/>
+            <a:ext cx="2048256" cy="256032"/>
           </a:xfrm>
           <a:prstGeom prst="rect">
             <a:avLst>
-              <a:gd name="adj" fmla="val 5161"/>
+              <a:gd name="adj" fmla="val 14286"/>
+            </a:avLst>
+          </a:prstGeom>
+          <a:solidFill>
+            <a:srgbClr val="F1F5F9"/>
+          </a:solidFill>
+          <a:ln/>
+        </p:spPr>
+      </p:sp>
+      <p:sp>
+        <p:nvSpPr>
+          <p:cNvPr id="26" name="Text 24"/>
+          <p:cNvSpPr/>
+          <p:nvPr/>
+        </p:nvSpPr>
+        <p:spPr>
+          <a:xfrm>
+            <a:off x="5001768" y="2596896"/>
+            <a:ext cx="2048256" cy="256032"/>
+          </a:xfrm>
+          <a:prstGeom prst="rect">
+            <a:avLst/>
+          </a:prstGeom>
+          <a:noFill/>
+          <a:ln/>
+        </p:spPr>
+        <p:txBody>
+          <a:bodyPr wrap="square" rtlCol="0" anchor="ctr"/>
+          <a:lstStyle/>
+          <a:p>
+            <a:pPr algn="ctr" indent="0" marL="0">
+              <a:buNone/>
+            </a:pPr>
+            <a:r>
+              <a:rPr lang="en-US" sz="750" b="1" dirty="0">
+                <a:solidFill>
+                  <a:srgbClr val="64748B"/>
+                </a:solidFill>
+                <a:latin typeface="Calibri" pitchFamily="34" charset="0"/>
+                <a:ea typeface="Calibri" pitchFamily="34" charset="-122"/>
+                <a:cs typeface="Calibri" pitchFamily="34" charset="-120"/>
+              </a:rPr>
+              <a:t>BASIC</a:t>
+            </a:r>
+            <a:endParaRPr lang="en-US" sz="750" dirty="0"/>
+          </a:p>
+        </p:txBody>
+      </p:sp>
+      <p:sp>
+        <p:nvSpPr>
+          <p:cNvPr id="27" name="Shape 25"/>
+          <p:cNvSpPr/>
+          <p:nvPr/>
+        </p:nvSpPr>
+        <p:spPr>
+          <a:xfrm>
+            <a:off x="7278624" y="1481328"/>
+            <a:ext cx="2194560" cy="1536192"/>
+          </a:xfrm>
+          <a:prstGeom prst="rect">
+            <a:avLst>
+              <a:gd name="adj" fmla="val 4762"/>
             </a:avLst>
           </a:prstGeom>
           <a:solidFill>
@@ -21065,14 +21470,14 @@
       </p:sp>
       <p:sp>
         <p:nvSpPr>
-          <p:cNvPr id="15" name="Text 13"/>
-          <p:cNvSpPr/>
-          <p:nvPr/>
-        </p:nvSpPr>
-        <p:spPr>
-          <a:xfrm>
-            <a:off x="7278624" y="1325880"/>
-            <a:ext cx="2194560" cy="1234440"/>
+          <p:cNvPr id="28" name="Text 26"/>
+          <p:cNvSpPr/>
+          <p:nvPr/>
+        </p:nvSpPr>
+        <p:spPr>
+          <a:xfrm>
+            <a:off x="7351776" y="1591056"/>
+            <a:ext cx="2048256" cy="1005840"/>
           </a:xfrm>
           <a:prstGeom prst="rect">
             <a:avLst/>
@@ -21096,7 +21501,7 @@
                 <a:ea typeface="Calibri" pitchFamily="34" charset="-122"/>
                 <a:cs typeface="Calibri" pitchFamily="34" charset="-120"/>
               </a:rPr>
-              <a:t>GST Invoicing</a:t>
+              <a:t>Dispatch &amp; Gatepasses</a:t>
             </a:r>
             <a:endParaRPr lang="en-US" sz="1050" dirty="0"/>
           </a:p>
@@ -21104,18 +21509,79 @@
       </p:sp>
       <p:sp>
         <p:nvSpPr>
-          <p:cNvPr id="16" name="Shape 14"/>
-          <p:cNvSpPr/>
-          <p:nvPr/>
-        </p:nvSpPr>
-        <p:spPr>
-          <a:xfrm>
-            <a:off x="9628632" y="1234440"/>
-            <a:ext cx="2194560" cy="1417320"/>
+          <p:cNvPr id="29" name="Shape 27"/>
+          <p:cNvSpPr/>
+          <p:nvPr/>
+        </p:nvSpPr>
+        <p:spPr>
+          <a:xfrm>
+            <a:off x="7351776" y="2596896"/>
+            <a:ext cx="2048256" cy="256032"/>
           </a:xfrm>
           <a:prstGeom prst="rect">
             <a:avLst>
-              <a:gd name="adj" fmla="val 5161"/>
+              <a:gd name="adj" fmla="val 14286"/>
+            </a:avLst>
+          </a:prstGeom>
+          <a:solidFill>
+            <a:srgbClr val="F1F5F9"/>
+          </a:solidFill>
+          <a:ln/>
+        </p:spPr>
+      </p:sp>
+      <p:sp>
+        <p:nvSpPr>
+          <p:cNvPr id="30" name="Text 28"/>
+          <p:cNvSpPr/>
+          <p:nvPr/>
+        </p:nvSpPr>
+        <p:spPr>
+          <a:xfrm>
+            <a:off x="7351776" y="2596896"/>
+            <a:ext cx="2048256" cy="256032"/>
+          </a:xfrm>
+          <a:prstGeom prst="rect">
+            <a:avLst/>
+          </a:prstGeom>
+          <a:noFill/>
+          <a:ln/>
+        </p:spPr>
+        <p:txBody>
+          <a:bodyPr wrap="square" rtlCol="0" anchor="ctr"/>
+          <a:lstStyle/>
+          <a:p>
+            <a:pPr algn="ctr" indent="0" marL="0">
+              <a:buNone/>
+            </a:pPr>
+            <a:r>
+              <a:rPr lang="en-US" sz="750" b="1" dirty="0">
+                <a:solidFill>
+                  <a:srgbClr val="64748B"/>
+                </a:solidFill>
+                <a:latin typeface="Calibri" pitchFamily="34" charset="0"/>
+                <a:ea typeface="Calibri" pitchFamily="34" charset="-122"/>
+                <a:cs typeface="Calibri" pitchFamily="34" charset="-120"/>
+              </a:rPr>
+              <a:t>BASIC</a:t>
+            </a:r>
+            <a:endParaRPr lang="en-US" sz="750" dirty="0"/>
+          </a:p>
+        </p:txBody>
+      </p:sp>
+      <p:sp>
+        <p:nvSpPr>
+          <p:cNvPr id="31" name="Shape 29"/>
+          <p:cNvSpPr/>
+          <p:nvPr/>
+        </p:nvSpPr>
+        <p:spPr>
+          <a:xfrm>
+            <a:off x="9628632" y="1481328"/>
+            <a:ext cx="2194560" cy="1536192"/>
+          </a:xfrm>
+          <a:prstGeom prst="rect">
+            <a:avLst>
+              <a:gd name="adj" fmla="val 4762"/>
             </a:avLst>
           </a:prstGeom>
           <a:solidFill>
@@ -21131,14 +21597,14 @@
       </p:sp>
       <p:sp>
         <p:nvSpPr>
-          <p:cNvPr id="17" name="Text 15"/>
-          <p:cNvSpPr/>
-          <p:nvPr/>
-        </p:nvSpPr>
-        <p:spPr>
-          <a:xfrm>
-            <a:off x="9628632" y="1325880"/>
-            <a:ext cx="2194560" cy="1234440"/>
+          <p:cNvPr id="32" name="Text 30"/>
+          <p:cNvSpPr/>
+          <p:nvPr/>
+        </p:nvSpPr>
+        <p:spPr>
+          <a:xfrm>
+            <a:off x="9701784" y="1591056"/>
+            <a:ext cx="2048256" cy="1005840"/>
           </a:xfrm>
           <a:prstGeom prst="rect">
             <a:avLst/>
@@ -21162,7 +21628,7 @@
                 <a:ea typeface="Calibri" pitchFamily="34" charset="-122"/>
                 <a:cs typeface="Calibri" pitchFamily="34" charset="-120"/>
               </a:rPr>
-              <a:t>Dispatch &amp; Gatepasses</a:t>
+              <a:t>Expenses &amp; Cash Register</a:t>
             </a:r>
             <a:endParaRPr lang="en-US" sz="1050" dirty="0"/>
           </a:p>
@@ -21170,22 +21636,83 @@
       </p:sp>
       <p:sp>
         <p:nvSpPr>
-          <p:cNvPr id="18" name="Shape 16"/>
-          <p:cNvSpPr/>
-          <p:nvPr/>
-        </p:nvSpPr>
-        <p:spPr>
-          <a:xfrm>
-            <a:off x="228600" y="2834640"/>
-            <a:ext cx="2194560" cy="1417320"/>
+          <p:cNvPr id="33" name="Shape 31"/>
+          <p:cNvSpPr/>
+          <p:nvPr/>
+        </p:nvSpPr>
+        <p:spPr>
+          <a:xfrm>
+            <a:off x="9701784" y="2596896"/>
+            <a:ext cx="2048256" cy="256032"/>
           </a:xfrm>
           <a:prstGeom prst="rect">
             <a:avLst>
-              <a:gd name="adj" fmla="val 5161"/>
+              <a:gd name="adj" fmla="val 14286"/>
             </a:avLst>
           </a:prstGeom>
           <a:solidFill>
-            <a:srgbClr val="FFFFFF"/>
+            <a:srgbClr val="F1F5F9"/>
+          </a:solidFill>
+          <a:ln/>
+        </p:spPr>
+      </p:sp>
+      <p:sp>
+        <p:nvSpPr>
+          <p:cNvPr id="34" name="Text 32"/>
+          <p:cNvSpPr/>
+          <p:nvPr/>
+        </p:nvSpPr>
+        <p:spPr>
+          <a:xfrm>
+            <a:off x="9701784" y="2596896"/>
+            <a:ext cx="2048256" cy="256032"/>
+          </a:xfrm>
+          <a:prstGeom prst="rect">
+            <a:avLst/>
+          </a:prstGeom>
+          <a:noFill/>
+          <a:ln/>
+        </p:spPr>
+        <p:txBody>
+          <a:bodyPr wrap="square" rtlCol="0" anchor="ctr"/>
+          <a:lstStyle/>
+          <a:p>
+            <a:pPr algn="ctr" indent="0" marL="0">
+              <a:buNone/>
+            </a:pPr>
+            <a:r>
+              <a:rPr lang="en-US" sz="750" b="1" dirty="0">
+                <a:solidFill>
+                  <a:srgbClr val="64748B"/>
+                </a:solidFill>
+                <a:latin typeface="Calibri" pitchFamily="34" charset="0"/>
+                <a:ea typeface="Calibri" pitchFamily="34" charset="-122"/>
+                <a:cs typeface="Calibri" pitchFamily="34" charset="-120"/>
+              </a:rPr>
+              <a:t>BASIC</a:t>
+            </a:r>
+            <a:endParaRPr lang="en-US" sz="750" dirty="0"/>
+          </a:p>
+        </p:txBody>
+      </p:sp>
+      <p:sp>
+        <p:nvSpPr>
+          <p:cNvPr id="35" name="Shape 33"/>
+          <p:cNvSpPr/>
+          <p:nvPr/>
+        </p:nvSpPr>
+        <p:spPr>
+          <a:xfrm>
+            <a:off x="228600" y="3200400"/>
+            <a:ext cx="2194560" cy="1536192"/>
+          </a:xfrm>
+          <a:prstGeom prst="rect">
+            <a:avLst>
+              <a:gd name="adj" fmla="val 4762"/>
+            </a:avLst>
+          </a:prstGeom>
+          <a:solidFill>
+            <a:srgbClr val="EFF6FF"/>
           </a:solidFill>
           <a:ln w="12700">
             <a:solidFill>
@@ -21197,14 +21724,14 @@
       </p:sp>
       <p:sp>
         <p:nvSpPr>
-          <p:cNvPr id="19" name="Text 17"/>
-          <p:cNvSpPr/>
-          <p:nvPr/>
-        </p:nvSpPr>
-        <p:spPr>
-          <a:xfrm>
-            <a:off x="228600" y="2926080"/>
-            <a:ext cx="2194560" cy="1234440"/>
+          <p:cNvPr id="36" name="Text 34"/>
+          <p:cNvSpPr/>
+          <p:nvPr/>
+        </p:nvSpPr>
+        <p:spPr>
+          <a:xfrm>
+            <a:off x="301752" y="3310128"/>
+            <a:ext cx="2048256" cy="1005840"/>
           </a:xfrm>
           <a:prstGeom prst="rect">
             <a:avLst/>
@@ -21222,13 +21749,13 @@
             <a:r>
               <a:rPr lang="en-US" sz="1050" b="1" dirty="0">
                 <a:solidFill>
-                  <a:srgbClr val="1E3A5F"/>
-                </a:solidFill>
-                <a:latin typeface="Calibri" pitchFamily="34" charset="0"/>
-                <a:ea typeface="Calibri" pitchFamily="34" charset="-122"/>
-                <a:cs typeface="Calibri" pitchFamily="34" charset="-120"/>
-              </a:rPr>
-              <a:t>Quality &amp; Returns</a:t>
+                  <a:srgbClr val="0369A1"/>
+                </a:solidFill>
+                <a:latin typeface="Calibri" pitchFamily="34" charset="0"/>
+                <a:ea typeface="Calibri" pitchFamily="34" charset="-122"/>
+                <a:cs typeface="Calibri" pitchFamily="34" charset="-120"/>
+              </a:rPr>
+              <a:t>Production Management</a:t>
             </a:r>
             <a:endParaRPr lang="en-US" sz="1050" dirty="0"/>
           </a:p>
@@ -21236,22 +21763,83 @@
       </p:sp>
       <p:sp>
         <p:nvSpPr>
-          <p:cNvPr id="20" name="Shape 18"/>
-          <p:cNvSpPr/>
-          <p:nvPr/>
-        </p:nvSpPr>
-        <p:spPr>
-          <a:xfrm>
-            <a:off x="2578608" y="2834640"/>
-            <a:ext cx="2194560" cy="1417320"/>
+          <p:cNvPr id="37" name="Shape 35"/>
+          <p:cNvSpPr/>
+          <p:nvPr/>
+        </p:nvSpPr>
+        <p:spPr>
+          <a:xfrm>
+            <a:off x="301752" y="4315968"/>
+            <a:ext cx="2048256" cy="256032"/>
           </a:xfrm>
           <a:prstGeom prst="rect">
             <a:avLst>
-              <a:gd name="adj" fmla="val 5161"/>
+              <a:gd name="adj" fmla="val 14286"/>
             </a:avLst>
           </a:prstGeom>
           <a:solidFill>
-            <a:srgbClr val="FFFFFF"/>
+            <a:srgbClr val="DBEAFE"/>
+          </a:solidFill>
+          <a:ln/>
+        </p:spPr>
+      </p:sp>
+      <p:sp>
+        <p:nvSpPr>
+          <p:cNvPr id="38" name="Text 36"/>
+          <p:cNvSpPr/>
+          <p:nvPr/>
+        </p:nvSpPr>
+        <p:spPr>
+          <a:xfrm>
+            <a:off x="301752" y="4315968"/>
+            <a:ext cx="2048256" cy="256032"/>
+          </a:xfrm>
+          <a:prstGeom prst="rect">
+            <a:avLst/>
+          </a:prstGeom>
+          <a:noFill/>
+          <a:ln/>
+        </p:spPr>
+        <p:txBody>
+          <a:bodyPr wrap="square" rtlCol="0" anchor="ctr"/>
+          <a:lstStyle/>
+          <a:p>
+            <a:pPr algn="ctr" indent="0" marL="0">
+              <a:buNone/>
+            </a:pPr>
+            <a:r>
+              <a:rPr lang="en-US" sz="750" b="1" dirty="0">
+                <a:solidFill>
+                  <a:srgbClr val="0369A1"/>
+                </a:solidFill>
+                <a:latin typeface="Calibri" pitchFamily="34" charset="0"/>
+                <a:ea typeface="Calibri" pitchFamily="34" charset="-122"/>
+                <a:cs typeface="Calibri" pitchFamily="34" charset="-120"/>
+              </a:rPr>
+              <a:t>PRO</a:t>
+            </a:r>
+            <a:endParaRPr lang="en-US" sz="750" dirty="0"/>
+          </a:p>
+        </p:txBody>
+      </p:sp>
+      <p:sp>
+        <p:nvSpPr>
+          <p:cNvPr id="39" name="Shape 37"/>
+          <p:cNvSpPr/>
+          <p:nvPr/>
+        </p:nvSpPr>
+        <p:spPr>
+          <a:xfrm>
+            <a:off x="2578608" y="3200400"/>
+            <a:ext cx="2194560" cy="1536192"/>
+          </a:xfrm>
+          <a:prstGeom prst="rect">
+            <a:avLst>
+              <a:gd name="adj" fmla="val 4762"/>
+            </a:avLst>
+          </a:prstGeom>
+          <a:solidFill>
+            <a:srgbClr val="EFF6FF"/>
           </a:solidFill>
           <a:ln w="12700">
             <a:solidFill>
@@ -21263,14 +21851,14 @@
       </p:sp>
       <p:sp>
         <p:nvSpPr>
-          <p:cNvPr id="21" name="Text 19"/>
-          <p:cNvSpPr/>
-          <p:nvPr/>
-        </p:nvSpPr>
-        <p:spPr>
-          <a:xfrm>
-            <a:off x="2578608" y="2926080"/>
-            <a:ext cx="2194560" cy="1234440"/>
+          <p:cNvPr id="40" name="Text 38"/>
+          <p:cNvSpPr/>
+          <p:nvPr/>
+        </p:nvSpPr>
+        <p:spPr>
+          <a:xfrm>
+            <a:off x="2651760" y="3310128"/>
+            <a:ext cx="2048256" cy="1005840"/>
           </a:xfrm>
           <a:prstGeom prst="rect">
             <a:avLst/>
@@ -21288,13 +21876,13 @@
             <a:r>
               <a:rPr lang="en-US" sz="1050" b="1" dirty="0">
                 <a:solidFill>
-                  <a:srgbClr val="1E3A5F"/>
-                </a:solidFill>
-                <a:latin typeface="Calibri" pitchFamily="34" charset="0"/>
-                <a:ea typeface="Calibri" pitchFamily="34" charset="-122"/>
-                <a:cs typeface="Calibri" pitchFamily="34" charset="-120"/>
-              </a:rPr>
-              <a:t>Double-Entry Accounting</a:t>
+                  <a:srgbClr val="0369A1"/>
+                </a:solidFill>
+                <a:latin typeface="Calibri" pitchFamily="34" charset="0"/>
+                <a:ea typeface="Calibri" pitchFamily="34" charset="-122"/>
+                <a:cs typeface="Calibri" pitchFamily="34" charset="-120"/>
+              </a:rPr>
+              <a:t>Quality &amp; Returns</a:t>
             </a:r>
             <a:endParaRPr lang="en-US" sz="1050" dirty="0"/>
           </a:p>
@@ -21302,22 +21890,83 @@
       </p:sp>
       <p:sp>
         <p:nvSpPr>
-          <p:cNvPr id="22" name="Shape 20"/>
-          <p:cNvSpPr/>
-          <p:nvPr/>
-        </p:nvSpPr>
-        <p:spPr>
-          <a:xfrm>
-            <a:off x="4928616" y="2834640"/>
-            <a:ext cx="2194560" cy="1417320"/>
+          <p:cNvPr id="41" name="Shape 39"/>
+          <p:cNvSpPr/>
+          <p:nvPr/>
+        </p:nvSpPr>
+        <p:spPr>
+          <a:xfrm>
+            <a:off x="2651760" y="4315968"/>
+            <a:ext cx="2048256" cy="256032"/>
           </a:xfrm>
           <a:prstGeom prst="rect">
             <a:avLst>
-              <a:gd name="adj" fmla="val 5161"/>
+              <a:gd name="adj" fmla="val 14286"/>
             </a:avLst>
           </a:prstGeom>
           <a:solidFill>
-            <a:srgbClr val="FFFFFF"/>
+            <a:srgbClr val="DBEAFE"/>
+          </a:solidFill>
+          <a:ln/>
+        </p:spPr>
+      </p:sp>
+      <p:sp>
+        <p:nvSpPr>
+          <p:cNvPr id="42" name="Text 40"/>
+          <p:cNvSpPr/>
+          <p:nvPr/>
+        </p:nvSpPr>
+        <p:spPr>
+          <a:xfrm>
+            <a:off x="2651760" y="4315968"/>
+            <a:ext cx="2048256" cy="256032"/>
+          </a:xfrm>
+          <a:prstGeom prst="rect">
+            <a:avLst/>
+          </a:prstGeom>
+          <a:noFill/>
+          <a:ln/>
+        </p:spPr>
+        <p:txBody>
+          <a:bodyPr wrap="square" rtlCol="0" anchor="ctr"/>
+          <a:lstStyle/>
+          <a:p>
+            <a:pPr algn="ctr" indent="0" marL="0">
+              <a:buNone/>
+            </a:pPr>
+            <a:r>
+              <a:rPr lang="en-US" sz="750" b="1" dirty="0">
+                <a:solidFill>
+                  <a:srgbClr val="0369A1"/>
+                </a:solidFill>
+                <a:latin typeface="Calibri" pitchFamily="34" charset="0"/>
+                <a:ea typeface="Calibri" pitchFamily="34" charset="-122"/>
+                <a:cs typeface="Calibri" pitchFamily="34" charset="-120"/>
+              </a:rPr>
+              <a:t>PRO</a:t>
+            </a:r>
+            <a:endParaRPr lang="en-US" sz="750" dirty="0"/>
+          </a:p>
+        </p:txBody>
+      </p:sp>
+      <p:sp>
+        <p:nvSpPr>
+          <p:cNvPr id="43" name="Shape 41"/>
+          <p:cNvSpPr/>
+          <p:nvPr/>
+        </p:nvSpPr>
+        <p:spPr>
+          <a:xfrm>
+            <a:off x="4928616" y="3200400"/>
+            <a:ext cx="2194560" cy="1536192"/>
+          </a:xfrm>
+          <a:prstGeom prst="rect">
+            <a:avLst>
+              <a:gd name="adj" fmla="val 4762"/>
+            </a:avLst>
+          </a:prstGeom>
+          <a:solidFill>
+            <a:srgbClr val="EFF6FF"/>
           </a:solidFill>
           <a:ln w="12700">
             <a:solidFill>
@@ -21329,14 +21978,14 @@
       </p:sp>
       <p:sp>
         <p:nvSpPr>
-          <p:cNvPr id="23" name="Text 21"/>
-          <p:cNvSpPr/>
-          <p:nvPr/>
-        </p:nvSpPr>
-        <p:spPr>
-          <a:xfrm>
-            <a:off x="4928616" y="2926080"/>
-            <a:ext cx="2194560" cy="1234440"/>
+          <p:cNvPr id="44" name="Text 42"/>
+          <p:cNvSpPr/>
+          <p:nvPr/>
+        </p:nvSpPr>
+        <p:spPr>
+          <a:xfrm>
+            <a:off x="5001768" y="3310128"/>
+            <a:ext cx="2048256" cy="1005840"/>
           </a:xfrm>
           <a:prstGeom prst="rect">
             <a:avLst/>
@@ -21354,13 +22003,13 @@
             <a:r>
               <a:rPr lang="en-US" sz="1050" b="1" dirty="0">
                 <a:solidFill>
-                  <a:srgbClr val="1E3A5F"/>
-                </a:solidFill>
-                <a:latin typeface="Calibri" pitchFamily="34" charset="0"/>
-                <a:ea typeface="Calibri" pitchFamily="34" charset="-122"/>
-                <a:cs typeface="Calibri" pitchFamily="34" charset="-120"/>
-              </a:rPr>
-              <a:t>MIS Analytics</a:t>
+                  <a:srgbClr val="0369A1"/>
+                </a:solidFill>
+                <a:latin typeface="Calibri" pitchFamily="34" charset="0"/>
+                <a:ea typeface="Calibri" pitchFamily="34" charset="-122"/>
+                <a:cs typeface="Calibri" pitchFamily="34" charset="-120"/>
+              </a:rPr>
+              <a:t>Double-Entry Accounting</a:t>
             </a:r>
             <a:endParaRPr lang="en-US" sz="1050" dirty="0"/>
           </a:p>
@@ -21368,22 +22017,83 @@
       </p:sp>
       <p:sp>
         <p:nvSpPr>
-          <p:cNvPr id="24" name="Shape 22"/>
-          <p:cNvSpPr/>
-          <p:nvPr/>
-        </p:nvSpPr>
-        <p:spPr>
-          <a:xfrm>
-            <a:off x="7278624" y="2834640"/>
-            <a:ext cx="2194560" cy="1417320"/>
+          <p:cNvPr id="45" name="Shape 43"/>
+          <p:cNvSpPr/>
+          <p:nvPr/>
+        </p:nvSpPr>
+        <p:spPr>
+          <a:xfrm>
+            <a:off x="5001768" y="4315968"/>
+            <a:ext cx="2048256" cy="256032"/>
           </a:xfrm>
           <a:prstGeom prst="rect">
             <a:avLst>
-              <a:gd name="adj" fmla="val 5161"/>
+              <a:gd name="adj" fmla="val 14286"/>
             </a:avLst>
           </a:prstGeom>
           <a:solidFill>
-            <a:srgbClr val="FFFFFF"/>
+            <a:srgbClr val="DBEAFE"/>
+          </a:solidFill>
+          <a:ln/>
+        </p:spPr>
+      </p:sp>
+      <p:sp>
+        <p:nvSpPr>
+          <p:cNvPr id="46" name="Text 44"/>
+          <p:cNvSpPr/>
+          <p:nvPr/>
+        </p:nvSpPr>
+        <p:spPr>
+          <a:xfrm>
+            <a:off x="5001768" y="4315968"/>
+            <a:ext cx="2048256" cy="256032"/>
+          </a:xfrm>
+          <a:prstGeom prst="rect">
+            <a:avLst/>
+          </a:prstGeom>
+          <a:noFill/>
+          <a:ln/>
+        </p:spPr>
+        <p:txBody>
+          <a:bodyPr wrap="square" rtlCol="0" anchor="ctr"/>
+          <a:lstStyle/>
+          <a:p>
+            <a:pPr algn="ctr" indent="0" marL="0">
+              <a:buNone/>
+            </a:pPr>
+            <a:r>
+              <a:rPr lang="en-US" sz="750" b="1" dirty="0">
+                <a:solidFill>
+                  <a:srgbClr val="0369A1"/>
+                </a:solidFill>
+                <a:latin typeface="Calibri" pitchFamily="34" charset="0"/>
+                <a:ea typeface="Calibri" pitchFamily="34" charset="-122"/>
+                <a:cs typeface="Calibri" pitchFamily="34" charset="-120"/>
+              </a:rPr>
+              <a:t>PRO</a:t>
+            </a:r>
+            <a:endParaRPr lang="en-US" sz="750" dirty="0"/>
+          </a:p>
+        </p:txBody>
+      </p:sp>
+      <p:sp>
+        <p:nvSpPr>
+          <p:cNvPr id="47" name="Shape 45"/>
+          <p:cNvSpPr/>
+          <p:nvPr/>
+        </p:nvSpPr>
+        <p:spPr>
+          <a:xfrm>
+            <a:off x="7278624" y="3200400"/>
+            <a:ext cx="2194560" cy="1536192"/>
+          </a:xfrm>
+          <a:prstGeom prst="rect">
+            <a:avLst>
+              <a:gd name="adj" fmla="val 4762"/>
+            </a:avLst>
+          </a:prstGeom>
+          <a:solidFill>
+            <a:srgbClr val="EFF6FF"/>
           </a:solidFill>
           <a:ln w="12700">
             <a:solidFill>
@@ -21395,14 +22105,14 @@
       </p:sp>
       <p:sp>
         <p:nvSpPr>
-          <p:cNvPr id="25" name="Text 23"/>
-          <p:cNvSpPr/>
-          <p:nvPr/>
-        </p:nvSpPr>
-        <p:spPr>
-          <a:xfrm>
-            <a:off x="7278624" y="2926080"/>
-            <a:ext cx="2194560" cy="1234440"/>
+          <p:cNvPr id="48" name="Text 46"/>
+          <p:cNvSpPr/>
+          <p:nvPr/>
+        </p:nvSpPr>
+        <p:spPr>
+          <a:xfrm>
+            <a:off x="7351776" y="3310128"/>
+            <a:ext cx="2048256" cy="1005840"/>
           </a:xfrm>
           <a:prstGeom prst="rect">
             <a:avLst/>
@@ -21420,13 +22130,13 @@
             <a:r>
               <a:rPr lang="en-US" sz="1050" b="1" dirty="0">
                 <a:solidFill>
-                  <a:srgbClr val="1E3A5F"/>
-                </a:solidFill>
-                <a:latin typeface="Calibri" pitchFamily="34" charset="0"/>
-                <a:ea typeface="Calibri" pitchFamily="34" charset="-122"/>
-                <a:cs typeface="Calibri" pitchFamily="34" charset="-120"/>
-              </a:rPr>
-              <a:t>Preventive Maintenance</a:t>
+                  <a:srgbClr val="0369A1"/>
+                </a:solidFill>
+                <a:latin typeface="Calibri" pitchFamily="34" charset="0"/>
+                <a:ea typeface="Calibri" pitchFamily="34" charset="-122"/>
+                <a:cs typeface="Calibri" pitchFamily="34" charset="-120"/>
+              </a:rPr>
+              <a:t>MIS Analytics</a:t>
             </a:r>
             <a:endParaRPr lang="en-US" sz="1050" dirty="0"/>
           </a:p>
@@ -21434,22 +22144,83 @@
       </p:sp>
       <p:sp>
         <p:nvSpPr>
-          <p:cNvPr id="26" name="Shape 24"/>
-          <p:cNvSpPr/>
-          <p:nvPr/>
-        </p:nvSpPr>
-        <p:spPr>
-          <a:xfrm>
-            <a:off x="9628632" y="2834640"/>
-            <a:ext cx="2194560" cy="1417320"/>
+          <p:cNvPr id="49" name="Shape 47"/>
+          <p:cNvSpPr/>
+          <p:nvPr/>
+        </p:nvSpPr>
+        <p:spPr>
+          <a:xfrm>
+            <a:off x="7351776" y="4315968"/>
+            <a:ext cx="2048256" cy="256032"/>
           </a:xfrm>
           <a:prstGeom prst="rect">
             <a:avLst>
-              <a:gd name="adj" fmla="val 5161"/>
+              <a:gd name="adj" fmla="val 14286"/>
             </a:avLst>
           </a:prstGeom>
           <a:solidFill>
-            <a:srgbClr val="FFFFFF"/>
+            <a:srgbClr val="DBEAFE"/>
+          </a:solidFill>
+          <a:ln/>
+        </p:spPr>
+      </p:sp>
+      <p:sp>
+        <p:nvSpPr>
+          <p:cNvPr id="50" name="Text 48"/>
+          <p:cNvSpPr/>
+          <p:nvPr/>
+        </p:nvSpPr>
+        <p:spPr>
+          <a:xfrm>
+            <a:off x="7351776" y="4315968"/>
+            <a:ext cx="2048256" cy="256032"/>
+          </a:xfrm>
+          <a:prstGeom prst="rect">
+            <a:avLst/>
+          </a:prstGeom>
+          <a:noFill/>
+          <a:ln/>
+        </p:spPr>
+        <p:txBody>
+          <a:bodyPr wrap="square" rtlCol="0" anchor="ctr"/>
+          <a:lstStyle/>
+          <a:p>
+            <a:pPr algn="ctr" indent="0" marL="0">
+              <a:buNone/>
+            </a:pPr>
+            <a:r>
+              <a:rPr lang="en-US" sz="750" b="1" dirty="0">
+                <a:solidFill>
+                  <a:srgbClr val="0369A1"/>
+                </a:solidFill>
+                <a:latin typeface="Calibri" pitchFamily="34" charset="0"/>
+                <a:ea typeface="Calibri" pitchFamily="34" charset="-122"/>
+                <a:cs typeface="Calibri" pitchFamily="34" charset="-120"/>
+              </a:rPr>
+              <a:t>PRO</a:t>
+            </a:r>
+            <a:endParaRPr lang="en-US" sz="750" dirty="0"/>
+          </a:p>
+        </p:txBody>
+      </p:sp>
+      <p:sp>
+        <p:nvSpPr>
+          <p:cNvPr id="51" name="Shape 49"/>
+          <p:cNvSpPr/>
+          <p:nvPr/>
+        </p:nvSpPr>
+        <p:spPr>
+          <a:xfrm>
+            <a:off x="9628632" y="3200400"/>
+            <a:ext cx="2194560" cy="1536192"/>
+          </a:xfrm>
+          <a:prstGeom prst="rect">
+            <a:avLst>
+              <a:gd name="adj" fmla="val 4762"/>
+            </a:avLst>
+          </a:prstGeom>
+          <a:solidFill>
+            <a:srgbClr val="EFF6FF"/>
           </a:solidFill>
           <a:ln w="12700">
             <a:solidFill>
@@ -21461,14 +22232,14 @@
       </p:sp>
       <p:sp>
         <p:nvSpPr>
-          <p:cNvPr id="27" name="Text 25"/>
-          <p:cNvSpPr/>
-          <p:nvPr/>
-        </p:nvSpPr>
-        <p:spPr>
-          <a:xfrm>
-            <a:off x="9628632" y="2926080"/>
-            <a:ext cx="2194560" cy="1234440"/>
+          <p:cNvPr id="52" name="Text 50"/>
+          <p:cNvSpPr/>
+          <p:nvPr/>
+        </p:nvSpPr>
+        <p:spPr>
+          <a:xfrm>
+            <a:off x="9701784" y="3310128"/>
+            <a:ext cx="2048256" cy="1005840"/>
           </a:xfrm>
           <a:prstGeom prst="rect">
             <a:avLst/>
@@ -21486,7 +22257,7 @@
             <a:r>
               <a:rPr lang="en-US" sz="1050" b="1" dirty="0">
                 <a:solidFill>
-                  <a:srgbClr val="1E3A5F"/>
+                  <a:srgbClr val="0369A1"/>
                 </a:solidFill>
                 <a:latin typeface="Calibri" pitchFamily="34" charset="0"/>
                 <a:ea typeface="Calibri" pitchFamily="34" charset="-122"/>
@@ -21500,22 +22271,83 @@
       </p:sp>
       <p:sp>
         <p:nvSpPr>
-          <p:cNvPr id="28" name="Shape 26"/>
-          <p:cNvSpPr/>
-          <p:nvPr/>
-        </p:nvSpPr>
-        <p:spPr>
-          <a:xfrm>
-            <a:off x="228600" y="4434840"/>
-            <a:ext cx="2194560" cy="1417320"/>
+          <p:cNvPr id="53" name="Shape 51"/>
+          <p:cNvSpPr/>
+          <p:nvPr/>
+        </p:nvSpPr>
+        <p:spPr>
+          <a:xfrm>
+            <a:off x="9701784" y="4315968"/>
+            <a:ext cx="2048256" cy="256032"/>
           </a:xfrm>
           <a:prstGeom prst="rect">
             <a:avLst>
-              <a:gd name="adj" fmla="val 5161"/>
+              <a:gd name="adj" fmla="val 14286"/>
             </a:avLst>
           </a:prstGeom>
           <a:solidFill>
-            <a:srgbClr val="FFFFFF"/>
+            <a:srgbClr val="DBEAFE"/>
+          </a:solidFill>
+          <a:ln/>
+        </p:spPr>
+      </p:sp>
+      <p:sp>
+        <p:nvSpPr>
+          <p:cNvPr id="54" name="Text 52"/>
+          <p:cNvSpPr/>
+          <p:nvPr/>
+        </p:nvSpPr>
+        <p:spPr>
+          <a:xfrm>
+            <a:off x="9701784" y="4315968"/>
+            <a:ext cx="2048256" cy="256032"/>
+          </a:xfrm>
+          <a:prstGeom prst="rect">
+            <a:avLst/>
+          </a:prstGeom>
+          <a:noFill/>
+          <a:ln/>
+        </p:spPr>
+        <p:txBody>
+          <a:bodyPr wrap="square" rtlCol="0" anchor="ctr"/>
+          <a:lstStyle/>
+          <a:p>
+            <a:pPr algn="ctr" indent="0" marL="0">
+              <a:buNone/>
+            </a:pPr>
+            <a:r>
+              <a:rPr lang="en-US" sz="750" b="1" dirty="0">
+                <a:solidFill>
+                  <a:srgbClr val="0369A1"/>
+                </a:solidFill>
+                <a:latin typeface="Calibri" pitchFamily="34" charset="0"/>
+                <a:ea typeface="Calibri" pitchFamily="34" charset="-122"/>
+                <a:cs typeface="Calibri" pitchFamily="34" charset="-120"/>
+              </a:rPr>
+              <a:t>PRO</a:t>
+            </a:r>
+            <a:endParaRPr lang="en-US" sz="750" dirty="0"/>
+          </a:p>
+        </p:txBody>
+      </p:sp>
+      <p:sp>
+        <p:nvSpPr>
+          <p:cNvPr id="55" name="Shape 53"/>
+          <p:cNvSpPr/>
+          <p:nvPr/>
+        </p:nvSpPr>
+        <p:spPr>
+          <a:xfrm>
+            <a:off x="228600" y="4919472"/>
+            <a:ext cx="2194560" cy="1536192"/>
+          </a:xfrm>
+          <a:prstGeom prst="rect">
+            <a:avLst>
+              <a:gd name="adj" fmla="val 4762"/>
+            </a:avLst>
+          </a:prstGeom>
+          <a:solidFill>
+            <a:srgbClr val="EFF6FF"/>
           </a:solidFill>
           <a:ln w="12700">
             <a:solidFill>
@@ -21527,14 +22359,14 @@
       </p:sp>
       <p:sp>
         <p:nvSpPr>
-          <p:cNvPr id="29" name="Text 27"/>
-          <p:cNvSpPr/>
-          <p:nvPr/>
-        </p:nvSpPr>
-        <p:spPr>
-          <a:xfrm>
-            <a:off x="228600" y="4526280"/>
-            <a:ext cx="2194560" cy="1234440"/>
+          <p:cNvPr id="56" name="Text 54"/>
+          <p:cNvSpPr/>
+          <p:nvPr/>
+        </p:nvSpPr>
+        <p:spPr>
+          <a:xfrm>
+            <a:off x="301752" y="5029200"/>
+            <a:ext cx="2048256" cy="1005840"/>
           </a:xfrm>
           <a:prstGeom prst="rect">
             <a:avLst/>
@@ -21552,13 +22384,13 @@
             <a:r>
               <a:rPr lang="en-US" sz="1050" b="1" dirty="0">
                 <a:solidFill>
-                  <a:srgbClr val="1E3A5F"/>
-                </a:solidFill>
-                <a:latin typeface="Calibri" pitchFamily="34" charset="0"/>
-                <a:ea typeface="Calibri" pitchFamily="34" charset="-122"/>
-                <a:cs typeface="Calibri" pitchFamily="34" charset="-120"/>
-              </a:rPr>
-              <a:t>Expenses &amp; Cash Register</a:t>
+                  <a:srgbClr val="0369A1"/>
+                </a:solidFill>
+                <a:latin typeface="Calibri" pitchFamily="34" charset="0"/>
+                <a:ea typeface="Calibri" pitchFamily="34" charset="-122"/>
+                <a:cs typeface="Calibri" pitchFamily="34" charset="-120"/>
+              </a:rPr>
+              <a:t>Preventive Maintenance</a:t>
             </a:r>
             <a:endParaRPr lang="en-US" sz="1050" dirty="0"/>
           </a:p>
@@ -21566,22 +22398,83 @@
       </p:sp>
       <p:sp>
         <p:nvSpPr>
-          <p:cNvPr id="30" name="Shape 28"/>
-          <p:cNvSpPr/>
-          <p:nvPr/>
-        </p:nvSpPr>
-        <p:spPr>
-          <a:xfrm>
-            <a:off x="2578608" y="4434840"/>
-            <a:ext cx="2194560" cy="1417320"/>
+          <p:cNvPr id="57" name="Shape 55"/>
+          <p:cNvSpPr/>
+          <p:nvPr/>
+        </p:nvSpPr>
+        <p:spPr>
+          <a:xfrm>
+            <a:off x="301752" y="6035040"/>
+            <a:ext cx="2048256" cy="256032"/>
           </a:xfrm>
           <a:prstGeom prst="rect">
             <a:avLst>
-              <a:gd name="adj" fmla="val 5161"/>
+              <a:gd name="adj" fmla="val 14286"/>
             </a:avLst>
           </a:prstGeom>
           <a:solidFill>
-            <a:srgbClr val="FFFFFF"/>
+            <a:srgbClr val="DBEAFE"/>
+          </a:solidFill>
+          <a:ln/>
+        </p:spPr>
+      </p:sp>
+      <p:sp>
+        <p:nvSpPr>
+          <p:cNvPr id="58" name="Text 56"/>
+          <p:cNvSpPr/>
+          <p:nvPr/>
+        </p:nvSpPr>
+        <p:spPr>
+          <a:xfrm>
+            <a:off x="301752" y="6035040"/>
+            <a:ext cx="2048256" cy="256032"/>
+          </a:xfrm>
+          <a:prstGeom prst="rect">
+            <a:avLst/>
+          </a:prstGeom>
+          <a:noFill/>
+          <a:ln/>
+        </p:spPr>
+        <p:txBody>
+          <a:bodyPr wrap="square" rtlCol="0" anchor="ctr"/>
+          <a:lstStyle/>
+          <a:p>
+            <a:pPr algn="ctr" indent="0" marL="0">
+              <a:buNone/>
+            </a:pPr>
+            <a:r>
+              <a:rPr lang="en-US" sz="750" b="1" dirty="0">
+                <a:solidFill>
+                  <a:srgbClr val="0369A1"/>
+                </a:solidFill>
+                <a:latin typeface="Calibri" pitchFamily="34" charset="0"/>
+                <a:ea typeface="Calibri" pitchFamily="34" charset="-122"/>
+                <a:cs typeface="Calibri" pitchFamily="34" charset="-120"/>
+              </a:rPr>
+              <a:t>PRO</a:t>
+            </a:r>
+            <a:endParaRPr lang="en-US" sz="750" dirty="0"/>
+          </a:p>
+        </p:txBody>
+      </p:sp>
+      <p:sp>
+        <p:nvSpPr>
+          <p:cNvPr id="59" name="Shape 57"/>
+          <p:cNvSpPr/>
+          <p:nvPr/>
+        </p:nvSpPr>
+        <p:spPr>
+          <a:xfrm>
+            <a:off x="2578608" y="4919472"/>
+            <a:ext cx="2194560" cy="1536192"/>
+          </a:xfrm>
+          <a:prstGeom prst="rect">
+            <a:avLst>
+              <a:gd name="adj" fmla="val 4762"/>
+            </a:avLst>
+          </a:prstGeom>
+          <a:solidFill>
+            <a:srgbClr val="EFF6FF"/>
           </a:solidFill>
           <a:ln w="12700">
             <a:solidFill>
@@ -21593,14 +22486,14 @@
       </p:sp>
       <p:sp>
         <p:nvSpPr>
-          <p:cNvPr id="31" name="Text 29"/>
-          <p:cNvSpPr/>
-          <p:nvPr/>
-        </p:nvSpPr>
-        <p:spPr>
-          <a:xfrm>
-            <a:off x="2578608" y="4526280"/>
-            <a:ext cx="2194560" cy="1234440"/>
+          <p:cNvPr id="60" name="Text 58"/>
+          <p:cNvSpPr/>
+          <p:nvPr/>
+        </p:nvSpPr>
+        <p:spPr>
+          <a:xfrm>
+            <a:off x="2651760" y="5029200"/>
+            <a:ext cx="2048256" cy="1005840"/>
           </a:xfrm>
           <a:prstGeom prst="rect">
             <a:avLst/>
@@ -21618,13 +22511,13 @@
             <a:r>
               <a:rPr lang="en-US" sz="1050" b="1" dirty="0">
                 <a:solidFill>
-                  <a:srgbClr val="1E3A5F"/>
-                </a:solidFill>
-                <a:latin typeface="Calibri" pitchFamily="34" charset="0"/>
-                <a:ea typeface="Calibri" pitchFamily="34" charset="-122"/>
-                <a:cs typeface="Calibri" pitchFamily="34" charset="-120"/>
-              </a:rPr>
-              <a:t>Document Management</a:t>
+                  <a:srgbClr val="0369A1"/>
+                </a:solidFill>
+                <a:latin typeface="Calibri" pitchFamily="34" charset="0"/>
+                <a:ea typeface="Calibri" pitchFamily="34" charset="-122"/>
+                <a:cs typeface="Calibri" pitchFamily="34" charset="-120"/>
+              </a:rPr>
+              <a:t>CRM Lead Management</a:t>
             </a:r>
             <a:endParaRPr lang="en-US" sz="1050" dirty="0"/>
           </a:p>
@@ -21632,18 +22525,79 @@
       </p:sp>
       <p:sp>
         <p:nvSpPr>
-          <p:cNvPr id="32" name="Shape 30"/>
-          <p:cNvSpPr/>
-          <p:nvPr/>
-        </p:nvSpPr>
-        <p:spPr>
-          <a:xfrm>
-            <a:off x="4928616" y="4434840"/>
-            <a:ext cx="2194560" cy="1417320"/>
+          <p:cNvPr id="61" name="Shape 59"/>
+          <p:cNvSpPr/>
+          <p:nvPr/>
+        </p:nvSpPr>
+        <p:spPr>
+          <a:xfrm>
+            <a:off x="2651760" y="6035040"/>
+            <a:ext cx="2048256" cy="256032"/>
           </a:xfrm>
           <a:prstGeom prst="rect">
             <a:avLst>
-              <a:gd name="adj" fmla="val 5161"/>
+              <a:gd name="adj" fmla="val 14286"/>
+            </a:avLst>
+          </a:prstGeom>
+          <a:solidFill>
+            <a:srgbClr val="DBEAFE"/>
+          </a:solidFill>
+          <a:ln/>
+        </p:spPr>
+      </p:sp>
+      <p:sp>
+        <p:nvSpPr>
+          <p:cNvPr id="62" name="Text 60"/>
+          <p:cNvSpPr/>
+          <p:nvPr/>
+        </p:nvSpPr>
+        <p:spPr>
+          <a:xfrm>
+            <a:off x="2651760" y="6035040"/>
+            <a:ext cx="2048256" cy="256032"/>
+          </a:xfrm>
+          <a:prstGeom prst="rect">
+            <a:avLst/>
+          </a:prstGeom>
+          <a:noFill/>
+          <a:ln/>
+        </p:spPr>
+        <p:txBody>
+          <a:bodyPr wrap="square" rtlCol="0" anchor="ctr"/>
+          <a:lstStyle/>
+          <a:p>
+            <a:pPr algn="ctr" indent="0" marL="0">
+              <a:buNone/>
+            </a:pPr>
+            <a:r>
+              <a:rPr lang="en-US" sz="750" b="1" dirty="0">
+                <a:solidFill>
+                  <a:srgbClr val="0369A1"/>
+                </a:solidFill>
+                <a:latin typeface="Calibri" pitchFamily="34" charset="0"/>
+                <a:ea typeface="Calibri" pitchFamily="34" charset="-122"/>
+                <a:cs typeface="Calibri" pitchFamily="34" charset="-120"/>
+              </a:rPr>
+              <a:t>PRO</a:t>
+            </a:r>
+            <a:endParaRPr lang="en-US" sz="750" dirty="0"/>
+          </a:p>
+        </p:txBody>
+      </p:sp>
+      <p:sp>
+        <p:nvSpPr>
+          <p:cNvPr id="63" name="Shape 61"/>
+          <p:cNvSpPr/>
+          <p:nvPr/>
+        </p:nvSpPr>
+        <p:spPr>
+          <a:xfrm>
+            <a:off x="4928616" y="4919472"/>
+            <a:ext cx="2194560" cy="1536192"/>
+          </a:xfrm>
+          <a:prstGeom prst="rect">
+            <a:avLst>
+              <a:gd name="adj" fmla="val 4762"/>
             </a:avLst>
           </a:prstGeom>
           <a:solidFill>
@@ -21659,14 +22613,14 @@
       </p:sp>
       <p:sp>
         <p:nvSpPr>
-          <p:cNvPr id="33" name="Text 31"/>
-          <p:cNvSpPr/>
-          <p:nvPr/>
-        </p:nvSpPr>
-        <p:spPr>
-          <a:xfrm>
-            <a:off x="4928616" y="4526280"/>
-            <a:ext cx="2194560" cy="1234440"/>
+          <p:cNvPr id="64" name="Text 62"/>
+          <p:cNvSpPr/>
+          <p:nvPr/>
+        </p:nvSpPr>
+        <p:spPr>
+          <a:xfrm>
+            <a:off x="5001768" y="5029200"/>
+            <a:ext cx="2048256" cy="1005840"/>
           </a:xfrm>
           <a:prstGeom prst="rect">
             <a:avLst/>
@@ -21690,7 +22644,7 @@
                 <a:ea typeface="Calibri" pitchFamily="34" charset="-122"/>
                 <a:cs typeface="Calibri" pitchFamily="34" charset="-120"/>
               </a:rPr>
-              <a:t>CRM Lead Management</a:t>
+              <a:t>HR &amp; Payroll</a:t>
             </a:r>
             <a:endParaRPr lang="en-US" sz="1050" dirty="0"/>
           </a:p>
@@ -21698,18 +22652,18 @@
       </p:sp>
       <p:sp>
         <p:nvSpPr>
-          <p:cNvPr id="34" name="Shape 32"/>
-          <p:cNvSpPr/>
-          <p:nvPr/>
-        </p:nvSpPr>
-        <p:spPr>
-          <a:xfrm>
-            <a:off x="6300216" y="4297680"/>
-            <a:ext cx="640080" cy="201168"/>
+          <p:cNvPr id="65" name="Shape 63"/>
+          <p:cNvSpPr/>
+          <p:nvPr/>
+        </p:nvSpPr>
+        <p:spPr>
+          <a:xfrm>
+            <a:off x="5001768" y="6035040"/>
+            <a:ext cx="2048256" cy="256032"/>
           </a:xfrm>
           <a:prstGeom prst="rect">
             <a:avLst>
-              <a:gd name="adj" fmla="val 18182"/>
+              <a:gd name="adj" fmla="val 14286"/>
             </a:avLst>
           </a:prstGeom>
           <a:solidFill>
@@ -21720,14 +22674,14 @@
       </p:sp>
       <p:sp>
         <p:nvSpPr>
-          <p:cNvPr id="35" name="Text 33"/>
-          <p:cNvSpPr/>
-          <p:nvPr/>
-        </p:nvSpPr>
-        <p:spPr>
-          <a:xfrm>
-            <a:off x="6300216" y="4297680"/>
-            <a:ext cx="640080" cy="201168"/>
+          <p:cNvPr id="66" name="Text 64"/>
+          <p:cNvSpPr/>
+          <p:nvPr/>
+        </p:nvSpPr>
+        <p:spPr>
+          <a:xfrm>
+            <a:off x="5001768" y="6035040"/>
+            <a:ext cx="2048256" cy="256032"/>
           </a:xfrm>
           <a:prstGeom prst="rect">
             <a:avLst/>
@@ -21743,7 +22697,7 @@
               <a:buNone/>
             </a:pPr>
             <a:r>
-              <a:rPr lang="en-US" sz="700" b="1" dirty="0">
+              <a:rPr lang="en-US" sz="750" b="1" dirty="0">
                 <a:solidFill>
                   <a:srgbClr val="1E293B"/>
                 </a:solidFill>
@@ -21751,26 +22705,26 @@
                 <a:ea typeface="Calibri" pitchFamily="34" charset="-122"/>
                 <a:cs typeface="Calibri" pitchFamily="34" charset="-120"/>
               </a:rPr>
-              <a:t>NEW</a:t>
-            </a:r>
-            <a:endParaRPr lang="en-US" sz="700" dirty="0"/>
-          </a:p>
-        </p:txBody>
-      </p:sp>
-      <p:sp>
-        <p:nvSpPr>
-          <p:cNvPr id="36" name="Shape 34"/>
-          <p:cNvSpPr/>
-          <p:nvPr/>
-        </p:nvSpPr>
-        <p:spPr>
-          <a:xfrm>
-            <a:off x="7278624" y="4434840"/>
-            <a:ext cx="2194560" cy="1417320"/>
+              <a:t>ENTERPRISE</a:t>
+            </a:r>
+            <a:endParaRPr lang="en-US" sz="750" dirty="0"/>
+          </a:p>
+        </p:txBody>
+      </p:sp>
+      <p:sp>
+        <p:nvSpPr>
+          <p:cNvPr id="67" name="Shape 65"/>
+          <p:cNvSpPr/>
+          <p:nvPr/>
+        </p:nvSpPr>
+        <p:spPr>
+          <a:xfrm>
+            <a:off x="7278624" y="4919472"/>
+            <a:ext cx="2194560" cy="1536192"/>
           </a:xfrm>
           <a:prstGeom prst="rect">
             <a:avLst>
-              <a:gd name="adj" fmla="val 5161"/>
+              <a:gd name="adj" fmla="val 4762"/>
             </a:avLst>
           </a:prstGeom>
           <a:solidFill>
@@ -21786,14 +22740,14 @@
       </p:sp>
       <p:sp>
         <p:nvSpPr>
-          <p:cNvPr id="37" name="Text 35"/>
-          <p:cNvSpPr/>
-          <p:nvPr/>
-        </p:nvSpPr>
-        <p:spPr>
-          <a:xfrm>
-            <a:off x="7278624" y="4526280"/>
-            <a:ext cx="2194560" cy="1234440"/>
+          <p:cNvPr id="68" name="Text 66"/>
+          <p:cNvSpPr/>
+          <p:nvPr/>
+        </p:nvSpPr>
+        <p:spPr>
+          <a:xfrm>
+            <a:off x="7351776" y="5029200"/>
+            <a:ext cx="2048256" cy="1005840"/>
           </a:xfrm>
           <a:prstGeom prst="rect">
             <a:avLst/>
@@ -21817,7 +22771,7 @@
                 <a:ea typeface="Calibri" pitchFamily="34" charset="-122"/>
                 <a:cs typeface="Calibri" pitchFamily="34" charset="-120"/>
               </a:rPr>
-              <a:t>HR &amp; Payroll</a:t>
+              <a:t>Employee Self-Service</a:t>
             </a:r>
             <a:endParaRPr lang="en-US" sz="1050" dirty="0"/>
           </a:p>
@@ -21825,18 +22779,18 @@
       </p:sp>
       <p:sp>
         <p:nvSpPr>
-          <p:cNvPr id="38" name="Shape 36"/>
-          <p:cNvSpPr/>
-          <p:nvPr/>
-        </p:nvSpPr>
-        <p:spPr>
-          <a:xfrm>
-            <a:off x="8650224" y="4297680"/>
-            <a:ext cx="640080" cy="201168"/>
+          <p:cNvPr id="69" name="Shape 67"/>
+          <p:cNvSpPr/>
+          <p:nvPr/>
+        </p:nvSpPr>
+        <p:spPr>
+          <a:xfrm>
+            <a:off x="7351776" y="6035040"/>
+            <a:ext cx="2048256" cy="256032"/>
           </a:xfrm>
           <a:prstGeom prst="rect">
             <a:avLst>
-              <a:gd name="adj" fmla="val 18182"/>
+              <a:gd name="adj" fmla="val 14286"/>
             </a:avLst>
           </a:prstGeom>
           <a:solidFill>
@@ -21847,14 +22801,14 @@
       </p:sp>
       <p:sp>
         <p:nvSpPr>
-          <p:cNvPr id="39" name="Text 37"/>
-          <p:cNvSpPr/>
-          <p:nvPr/>
-        </p:nvSpPr>
-        <p:spPr>
-          <a:xfrm>
-            <a:off x="8650224" y="4297680"/>
-            <a:ext cx="640080" cy="201168"/>
+          <p:cNvPr id="70" name="Text 68"/>
+          <p:cNvSpPr/>
+          <p:nvPr/>
+        </p:nvSpPr>
+        <p:spPr>
+          <a:xfrm>
+            <a:off x="7351776" y="6035040"/>
+            <a:ext cx="2048256" cy="256032"/>
           </a:xfrm>
           <a:prstGeom prst="rect">
             <a:avLst/>
@@ -21870,7 +22824,7 @@
               <a:buNone/>
             </a:pPr>
             <a:r>
-              <a:rPr lang="en-US" sz="700" b="1" dirty="0">
+              <a:rPr lang="en-US" sz="750" b="1" dirty="0">
                 <a:solidFill>
                   <a:srgbClr val="1E293B"/>
                 </a:solidFill>
@@ -21878,26 +22832,26 @@
                 <a:ea typeface="Calibri" pitchFamily="34" charset="-122"/>
                 <a:cs typeface="Calibri" pitchFamily="34" charset="-120"/>
               </a:rPr>
-              <a:t>NEW</a:t>
-            </a:r>
-            <a:endParaRPr lang="en-US" sz="700" dirty="0"/>
-          </a:p>
-        </p:txBody>
-      </p:sp>
-      <p:sp>
-        <p:nvSpPr>
-          <p:cNvPr id="40" name="Shape 38"/>
-          <p:cNvSpPr/>
-          <p:nvPr/>
-        </p:nvSpPr>
-        <p:spPr>
-          <a:xfrm>
-            <a:off x="9628632" y="4434840"/>
-            <a:ext cx="2194560" cy="1417320"/>
+              <a:t>ENTERPRISE</a:t>
+            </a:r>
+            <a:endParaRPr lang="en-US" sz="750" dirty="0"/>
+          </a:p>
+        </p:txBody>
+      </p:sp>
+      <p:sp>
+        <p:nvSpPr>
+          <p:cNvPr id="71" name="Shape 69"/>
+          <p:cNvSpPr/>
+          <p:nvPr/>
+        </p:nvSpPr>
+        <p:spPr>
+          <a:xfrm>
+            <a:off x="9628632" y="4919472"/>
+            <a:ext cx="2194560" cy="1536192"/>
           </a:xfrm>
           <a:prstGeom prst="rect">
             <a:avLst>
-              <a:gd name="adj" fmla="val 5161"/>
+              <a:gd name="adj" fmla="val 4762"/>
             </a:avLst>
           </a:prstGeom>
           <a:solidFill>
@@ -21913,14 +22867,14 @@
       </p:sp>
       <p:sp>
         <p:nvSpPr>
-          <p:cNvPr id="41" name="Text 39"/>
-          <p:cNvSpPr/>
-          <p:nvPr/>
-        </p:nvSpPr>
-        <p:spPr>
-          <a:xfrm>
-            <a:off x="9628632" y="4526280"/>
-            <a:ext cx="2194560" cy="1234440"/>
+          <p:cNvPr id="72" name="Text 70"/>
+          <p:cNvSpPr/>
+          <p:nvPr/>
+        </p:nvSpPr>
+        <p:spPr>
+          <a:xfrm>
+            <a:off x="9701784" y="5029200"/>
+            <a:ext cx="2048256" cy="1005840"/>
           </a:xfrm>
           <a:prstGeom prst="rect">
             <a:avLst/>
@@ -21944,7 +22898,7 @@
                 <a:ea typeface="Calibri" pitchFamily="34" charset="-122"/>
                 <a:cs typeface="Calibri" pitchFamily="34" charset="-120"/>
               </a:rPr>
-              <a:t>Employee Self-Service</a:t>
+              <a:t>Document Management</a:t>
             </a:r>
             <a:endParaRPr lang="en-US" sz="1050" dirty="0"/>
           </a:p>
@@ -21952,18 +22906,18 @@
       </p:sp>
       <p:sp>
         <p:nvSpPr>
-          <p:cNvPr id="42" name="Shape 40"/>
-          <p:cNvSpPr/>
-          <p:nvPr/>
-        </p:nvSpPr>
-        <p:spPr>
-          <a:xfrm>
-            <a:off x="11000232" y="4297680"/>
-            <a:ext cx="640080" cy="201168"/>
+          <p:cNvPr id="73" name="Shape 71"/>
+          <p:cNvSpPr/>
+          <p:nvPr/>
+        </p:nvSpPr>
+        <p:spPr>
+          <a:xfrm>
+            <a:off x="9701784" y="6035040"/>
+            <a:ext cx="2048256" cy="256032"/>
           </a:xfrm>
           <a:prstGeom prst="rect">
             <a:avLst>
-              <a:gd name="adj" fmla="val 18182"/>
+              <a:gd name="adj" fmla="val 14286"/>
             </a:avLst>
           </a:prstGeom>
           <a:solidFill>
@@ -21974,14 +22928,14 @@
       </p:sp>
       <p:sp>
         <p:nvSpPr>
-          <p:cNvPr id="43" name="Text 41"/>
-          <p:cNvSpPr/>
-          <p:nvPr/>
-        </p:nvSpPr>
-        <p:spPr>
-          <a:xfrm>
-            <a:off x="11000232" y="4297680"/>
-            <a:ext cx="640080" cy="201168"/>
+          <p:cNvPr id="74" name="Text 72"/>
+          <p:cNvSpPr/>
+          <p:nvPr/>
+        </p:nvSpPr>
+        <p:spPr>
+          <a:xfrm>
+            <a:off x="9701784" y="6035040"/>
+            <a:ext cx="2048256" cy="256032"/>
           </a:xfrm>
           <a:prstGeom prst="rect">
             <a:avLst/>
@@ -21997,7 +22951,7 @@
               <a:buNone/>
             </a:pPr>
             <a:r>
-              <a:rPr lang="en-US" sz="700" b="1" dirty="0">
+              <a:rPr lang="en-US" sz="750" b="1" dirty="0">
                 <a:solidFill>
                   <a:srgbClr val="1E293B"/>
                 </a:solidFill>
@@ -22005,9 +22959,9 @@
                 <a:ea typeface="Calibri" pitchFamily="34" charset="-122"/>
                 <a:cs typeface="Calibri" pitchFamily="34" charset="-120"/>
               </a:rPr>
-              <a:t>NEW</a:t>
-            </a:r>
-            <a:endParaRPr lang="en-US" sz="700" dirty="0"/>
+              <a:t>ENTERPRISE</a:t>
+            </a:r>
+            <a:endParaRPr lang="en-US" sz="750" dirty="0"/>
           </a:p>
         </p:txBody>
       </p:sp>
